--- a/metro/metro-b03-logo-lockups.pptx
+++ b/metro/metro-b03-logo-lockups.pptx
@@ -4438,9 +4438,9 @@
                 <a:solidFill>
                   <a:srgbClr val="14161A"/>
                 </a:solidFill>
-                <a:latin typeface="Space Grotesk"/>
-                <a:ea typeface="Space Grotesk"/>
-                <a:cs typeface="Space Grotesk"/>
+                <a:latin typeface="HK Grotesk"/>
+                <a:ea typeface="HK Grotesk"/>
+                <a:cs typeface="HK Grotesk"/>
               </a:rPr>
               <a:t>North &amp; Oak</a:t>
             </a:r>
@@ -4547,9 +4547,9 @@
                 <a:solidFill>
                   <a:srgbClr val="14161A"/>
                 </a:solidFill>
-                <a:latin typeface="Space Grotesk"/>
-                <a:ea typeface="Space Grotesk"/>
-                <a:cs typeface="Space Grotesk"/>
+                <a:latin typeface="HK Grotesk"/>
+                <a:ea typeface="HK Grotesk"/>
+                <a:cs typeface="HK Grotesk"/>
               </a:rPr>
               <a:t>LOGO LOCKUPS</a:t>
             </a:r>
@@ -4586,9 +4586,9 @@
                 <a:solidFill>
                   <a:srgbClr val="14161A"/>
                 </a:solidFill>
-                <a:latin typeface="Space Grotesk"/>
-                <a:ea typeface="Space Grotesk"/>
-                <a:cs typeface="Space Grotesk"/>
+                <a:latin typeface="HK Grotesk"/>
+                <a:ea typeface="HK Grotesk"/>
+                <a:cs typeface="HK Grotesk"/>
               </a:rPr>
               <a:t>NO</a:t>
             </a:r>
@@ -4625,9 +4625,9 @@
                 <a:solidFill>
                   <a:srgbClr val="14161A"/>
                 </a:solidFill>
-                <a:latin typeface="Space Grotesk"/>
-                <a:ea typeface="Space Grotesk"/>
-                <a:cs typeface="Space Grotesk"/>
+                <a:latin typeface="HK Grotesk"/>
+                <a:ea typeface="HK Grotesk"/>
+                <a:cs typeface="HK Grotesk"/>
               </a:rPr>
               <a:t>North &amp; Oak</a:t>
             </a:r>
@@ -4734,9 +4734,9 @@
                 <a:solidFill>
                   <a:srgbClr val="14161A"/>
                 </a:solidFill>
-                <a:latin typeface="Space Grotesk"/>
-                <a:ea typeface="Space Grotesk"/>
-                <a:cs typeface="Space Grotesk"/>
+                <a:latin typeface="HK Grotesk"/>
+                <a:ea typeface="HK Grotesk"/>
+                <a:cs typeface="HK Grotesk"/>
               </a:rPr>
               <a:t>NO</a:t>
             </a:r>
@@ -4773,9 +4773,9 @@
                 <a:solidFill>
                   <a:srgbClr val="14161A"/>
                 </a:solidFill>
-                <a:latin typeface="Space Grotesk"/>
-                <a:ea typeface="Space Grotesk"/>
-                <a:cs typeface="Space Grotesk"/>
+                <a:latin typeface="HK Grotesk"/>
+                <a:ea typeface="HK Grotesk"/>
+                <a:cs typeface="HK Grotesk"/>
               </a:rPr>
               <a:t>North &amp; Oak</a:t>
             </a:r>
@@ -4882,9 +4882,9 @@
                 <a:solidFill>
                   <a:srgbClr val="2D5BE3"/>
                 </a:solidFill>
-                <a:latin typeface="Space Grotesk"/>
-                <a:ea typeface="Space Grotesk"/>
-                <a:cs typeface="Space Grotesk"/>
+                <a:latin typeface="HK Grotesk"/>
+                <a:ea typeface="HK Grotesk"/>
+                <a:cs typeface="HK Grotesk"/>
               </a:rPr>
               <a:t>NO</a:t>
             </a:r>
@@ -4991,9 +4991,9 @@
                 <a:solidFill>
                   <a:srgbClr val="14161A"/>
                 </a:solidFill>
-                <a:latin typeface="Space Grotesk"/>
-                <a:ea typeface="Space Grotesk"/>
-                <a:cs typeface="Space Grotesk"/>
+                <a:latin typeface="HK Grotesk"/>
+                <a:ea typeface="HK Grotesk"/>
+                <a:cs typeface="HK Grotesk"/>
               </a:rPr>
               <a:t>North &amp; Oak</a:t>
             </a:r>
